--- a/第1回_n-gram/excel_n_gram_slides.pptx
+++ b/第1回_n-gram/excel_n_gram_slides.pptx
@@ -3210,7 +3210,7 @@
         <p:spPr>
           <a:xfrm>
             <a:off x="640080" y="868680"/>
-            <a:ext cx="6766560" cy="594360"/>
+            <a:ext cx="6949440" cy="594360"/>
           </a:xfrm>
           <a:prstGeom prst="rect">
             <a:avLst/>
@@ -3223,15 +3223,15 @@
           </a:bodyPr>
           <a:lstStyle/>
           <a:p>
-            <a:pPr algn="r"/>
-            <a:r>
-              <a:rPr sz="850">
-                <a:solidFill>
-                  <a:srgbClr val="64748B"/>
-                </a:solidFill>
-                <a:latin typeface="Yu Gothic"/>
-              </a:rPr>
-              <a:t>Excelで体験する言語モデルのしくみ | 第1回 | 1</a:t>
+            <a:pPr algn="l"/>
+            <a:r>
+              <a:rPr sz="2500" b="1">
+                <a:solidFill>
+                  <a:srgbClr val="24324B"/>
+                </a:solidFill>
+                <a:latin typeface="Yu Gothic"/>
+              </a:rPr>
+              <a:t>Excelで体験する 言語モデルのしくみ</a:t>
             </a:r>
           </a:p>
         </p:txBody>
@@ -3279,7 +3279,7 @@
         <p:spPr>
           <a:xfrm>
             <a:off x="685800" y="2148840"/>
-            <a:ext cx="5669280" cy="731520"/>
+            <a:ext cx="5806440" cy="731520"/>
           </a:xfrm>
           <a:prstGeom prst="rect">
             <a:avLst/>
